--- a/m5/diapositivos/sessao-01-m5-f02.pptx
+++ b/m5/diapositivos/sessao-01-m5-f02.pptx
@@ -4215,7 +4215,35 @@
                 <a:ea typeface="Arial" pitchFamily="34" charset="-122"/>
                 <a:cs typeface="Arial" pitchFamily="34" charset="-120"/>
               </a:rPr>
-              <a:t>Camilo Castelo Branco, Amor de Perdição (1862), grafia da edição.</a:t>
+              <a:t>Camilo Castelo Branco, </a:t>
+            </a:r>
+            <a:pPr indent="0" marL="0">
+              <a:buNone/>
+            </a:pPr>
+            <a:r>
+              <a:rPr lang="en-US" sz="1200" i="1" dirty="0">
+                <a:solidFill>
+                  <a:srgbClr val="A9A79F"/>
+                </a:solidFill>
+                <a:latin typeface="Arial" pitchFamily="34" charset="0"/>
+                <a:ea typeface="Arial" pitchFamily="34" charset="-122"/>
+                <a:cs typeface="Arial" pitchFamily="34" charset="-120"/>
+              </a:rPr>
+              <a:t>Amor de Perdição</a:t>
+            </a:r>
+            <a:pPr indent="0" marL="0">
+              <a:buNone/>
+            </a:pPr>
+            <a:r>
+              <a:rPr lang="en-US" sz="1200" dirty="0">
+                <a:solidFill>
+                  <a:srgbClr val="A9A79F"/>
+                </a:solidFill>
+                <a:latin typeface="Arial" pitchFamily="34" charset="0"/>
+                <a:ea typeface="Arial" pitchFamily="34" charset="-122"/>
+                <a:cs typeface="Arial" pitchFamily="34" charset="-120"/>
+              </a:rPr>
+              <a:t> (1862), grafia da edição.</a:t>
             </a:r>
             <a:endParaRPr lang="en-US" sz="1200" dirty="0"/>
           </a:p>
@@ -4506,7 +4534,7 @@
               <a:buNone/>
             </a:pPr>
             <a:r>
-              <a:rPr lang="en-US" sz="2200" dirty="0">
+              <a:rPr lang="en-US" sz="2200" i="1" dirty="0">
                 <a:solidFill>
                   <a:srgbClr val="F2F0EA"/>
                 </a:solidFill>
@@ -4514,11 +4542,8 @@
                 <a:ea typeface="Georgia" pitchFamily="34" charset="-122"/>
                 <a:cs typeface="Georgia" pitchFamily="34" charset="-120"/>
               </a:rPr>
-              <a:t>Filippe Moreira Dias.</a:t>
-            </a:r>
-            <a:endParaRPr lang="en-US" sz="2200" dirty="0"/>
-          </a:p>
-          <a:p>
+              <a:t>Filippe Moreira Dias</a:t>
+            </a:r>
             <a:pPr indent="0" marL="0">
               <a:lnSpc>
                 <a:spcPct val="125000"/>
@@ -4534,7 +4559,7 @@
                 <a:ea typeface="Georgia" pitchFamily="34" charset="-122"/>
                 <a:cs typeface="Georgia" pitchFamily="34" charset="-120"/>
               </a:rPr>
-              <a:t>Á margem esquerda d'este assento está escripto: Foi para a India em 17 de Março de 1807.</a:t>
+              <a:t>.</a:t>
             </a:r>
             <a:endParaRPr lang="en-US" sz="2200" dirty="0"/>
           </a:p>
@@ -4554,6 +4579,60 @@
                 <a:ea typeface="Georgia" pitchFamily="34" charset="-122"/>
                 <a:cs typeface="Georgia" pitchFamily="34" charset="-120"/>
               </a:rPr>
+              <a:t>Á margem esquerda d'este assento está escripto: </a:t>
+            </a:r>
+            <a:pPr indent="0" marL="0">
+              <a:lnSpc>
+                <a:spcPct val="125000"/>
+              </a:lnSpc>
+              <a:buNone/>
+            </a:pPr>
+            <a:r>
+              <a:rPr lang="en-US" sz="2200" i="1" dirty="0">
+                <a:solidFill>
+                  <a:srgbClr val="F2F0EA"/>
+                </a:solidFill>
+                <a:latin typeface="Georgia" pitchFamily="34" charset="0"/>
+                <a:ea typeface="Georgia" pitchFamily="34" charset="-122"/>
+                <a:cs typeface="Georgia" pitchFamily="34" charset="-120"/>
+              </a:rPr>
+              <a:t>Foi para a India em 17 de Março de 1807</a:t>
+            </a:r>
+            <a:pPr indent="0" marL="0">
+              <a:lnSpc>
+                <a:spcPct val="125000"/>
+              </a:lnSpc>
+              <a:buNone/>
+            </a:pPr>
+            <a:r>
+              <a:rPr lang="en-US" sz="2200" dirty="0">
+                <a:solidFill>
+                  <a:srgbClr val="F2F0EA"/>
+                </a:solidFill>
+                <a:latin typeface="Georgia" pitchFamily="34" charset="0"/>
+                <a:ea typeface="Georgia" pitchFamily="34" charset="-122"/>
+                <a:cs typeface="Georgia" pitchFamily="34" charset="-120"/>
+              </a:rPr>
+              <a:t>.</a:t>
+            </a:r>
+            <a:endParaRPr lang="en-US" sz="2200" dirty="0"/>
+          </a:p>
+          <a:p>
+            <a:pPr indent="0" marL="0">
+              <a:lnSpc>
+                <a:spcPct val="125000"/>
+              </a:lnSpc>
+              <a:buNone/>
+            </a:pPr>
+            <a:r>
+              <a:rPr lang="en-US" sz="2200" dirty="0">
+                <a:solidFill>
+                  <a:srgbClr val="F2F0EA"/>
+                </a:solidFill>
+                <a:latin typeface="Georgia" pitchFamily="34" charset="0"/>
+                <a:ea typeface="Georgia" pitchFamily="34" charset="-122"/>
+                <a:cs typeface="Georgia" pitchFamily="34" charset="-120"/>
+              </a:rPr>
               <a:t>[…]</a:t>
             </a:r>
             <a:endParaRPr lang="en-US" sz="2200" dirty="0"/>
@@ -4595,7 +4674,35 @@
                 <a:ea typeface="Arial" pitchFamily="34" charset="-122"/>
                 <a:cs typeface="Arial" pitchFamily="34" charset="-120"/>
               </a:rPr>
-              <a:t>Camilo Castelo Branco, Amor de Perdição (1862), grafia da edição.</a:t>
+              <a:t>Camilo Castelo Branco, </a:t>
+            </a:r>
+            <a:pPr indent="0" marL="0">
+              <a:buNone/>
+            </a:pPr>
+            <a:r>
+              <a:rPr lang="en-US" sz="1200" i="1" dirty="0">
+                <a:solidFill>
+                  <a:srgbClr val="A9A79F"/>
+                </a:solidFill>
+                <a:latin typeface="Arial" pitchFamily="34" charset="0"/>
+                <a:ea typeface="Arial" pitchFamily="34" charset="-122"/>
+                <a:cs typeface="Arial" pitchFamily="34" charset="-120"/>
+              </a:rPr>
+              <a:t>Amor de Perdição</a:t>
+            </a:r>
+            <a:pPr indent="0" marL="0">
+              <a:buNone/>
+            </a:pPr>
+            <a:r>
+              <a:rPr lang="en-US" sz="1200" dirty="0">
+                <a:solidFill>
+                  <a:srgbClr val="A9A79F"/>
+                </a:solidFill>
+                <a:latin typeface="Arial" pitchFamily="34" charset="0"/>
+                <a:ea typeface="Arial" pitchFamily="34" charset="-122"/>
+                <a:cs typeface="Arial" pitchFamily="34" charset="-120"/>
+              </a:rPr>
+              <a:t> (1862), grafia da edição.</a:t>
             </a:r>
             <a:endParaRPr lang="en-US" sz="1200" dirty="0"/>
           </a:p>
@@ -5002,7 +5109,41 @@
                 <a:ea typeface="Arial" pitchFamily="34" charset="-122"/>
                 <a:cs typeface="Arial" pitchFamily="34" charset="-120"/>
               </a:rPr>
-              <a:t>Camilo Castelo Branco abre Amor de Perdição (1862) com um documento de arquivo: o assento de entrada de Simão Botelho, preso de dezoito anos, na cadeia da Relação do Porto.</a:t>
+              <a:t>Camilo Castelo Branco abre </a:t>
+            </a:r>
+            <a:pPr indent="0" marL="0">
+              <a:lnSpc>
+                <a:spcPct val="105000"/>
+              </a:lnSpc>
+              <a:buNone/>
+            </a:pPr>
+            <a:r>
+              <a:rPr lang="en-US" sz="2200" i="1" dirty="0">
+                <a:solidFill>
+                  <a:srgbClr val="F2F0EA"/>
+                </a:solidFill>
+                <a:latin typeface="Arial" pitchFamily="34" charset="0"/>
+                <a:ea typeface="Arial" pitchFamily="34" charset="-122"/>
+                <a:cs typeface="Arial" pitchFamily="34" charset="-120"/>
+              </a:rPr>
+              <a:t>Amor de Perdição</a:t>
+            </a:r>
+            <a:pPr indent="0" marL="0">
+              <a:lnSpc>
+                <a:spcPct val="105000"/>
+              </a:lnSpc>
+              <a:buNone/>
+            </a:pPr>
+            <a:r>
+              <a:rPr lang="en-US" sz="2200" dirty="0">
+                <a:solidFill>
+                  <a:srgbClr val="F2F0EA"/>
+                </a:solidFill>
+                <a:latin typeface="Arial" pitchFamily="34" charset="0"/>
+                <a:ea typeface="Arial" pitchFamily="34" charset="-122"/>
+                <a:cs typeface="Arial" pitchFamily="34" charset="-120"/>
+              </a:rPr>
+              <a:t> (1862) com um documento de arquivo: o assento de entrada de Simão Botelho, preso de dezoito anos, na cadeia da Relação do Porto.</a:t>
             </a:r>
             <a:endParaRPr lang="en-US" sz="2200" dirty="0"/>
           </a:p>
